--- a/W3A5-UML Diagram.pptx
+++ b/W3A5-UML Diagram.pptx
@@ -4,6 +4,9 @@
   <p:sldMasterIdLst>
     <p:sldMasterId id="2147483648" r:id="rId1"/>
   </p:sldMasterIdLst>
+  <p:notesMasterIdLst>
+    <p:notesMasterId r:id="rId3"/>
+  </p:notesMasterIdLst>
   <p:sldIdLst>
     <p:sldId id="256" r:id="rId2"/>
   </p:sldIdLst>
@@ -104,7 +107,651 @@
       </a:defRPr>
     </a:lvl9pPr>
   </p:defaultTextStyle>
+  <p:extLst>
+    <p:ext uri="{EFAFB233-063F-42B5-8137-9DF3F51BA10A}">
+      <p15:sldGuideLst xmlns:p15="http://schemas.microsoft.com/office/powerpoint/2012/main"/>
+    </p:ext>
+  </p:extLst>
 </p:presentation>
+</file>
+
+<file path=ppt/revisionInfo.xml><?xml version="1.0" encoding="utf-8"?>
+<p1510:revInfo xmlns:a="http://schemas.openxmlformats.org/drawingml/2006/main" xmlns:r="http://schemas.openxmlformats.org/officeDocument/2006/relationships" xmlns:p1510="http://schemas.microsoft.com/office/powerpoint/2015/10/main">
+  <p1510:revLst>
+    <p1510:client id="{DFD4B390-A96F-4752-B02D-CA2DCADD5243}" v="4" dt="2025-12-15T05:31:58.889"/>
+  </p1510:revLst>
+</p1510:revInfo>
+</file>
+
+<file path=ppt/changesInfos/changesInfo1.xml><?xml version="1.0" encoding="utf-8"?>
+<pc:chgInfo xmlns:a="http://schemas.openxmlformats.org/drawingml/2006/main" xmlns:r="http://schemas.openxmlformats.org/officeDocument/2006/relationships" xmlns:ac="http://schemas.microsoft.com/office/drawing/2013/main/command" xmlns:pc="http://schemas.microsoft.com/office/powerpoint/2013/main/command">
+  <pc:docChgLst>
+    <pc:chgData name="Andre Benedetti" userId="60466d4fc085b17e" providerId="LiveId" clId="{6AE31E5C-6838-415C-9ED3-0CC1084E645F}"/>
+    <pc:docChg chg="custSel modSld">
+      <pc:chgData name="Andre Benedetti" userId="60466d4fc085b17e" providerId="LiveId" clId="{6AE31E5C-6838-415C-9ED3-0CC1084E645F}" dt="2025-12-15T05:32:10.034" v="54" actId="20577"/>
+      <pc:docMkLst>
+        <pc:docMk/>
+      </pc:docMkLst>
+      <pc:sldChg chg="addSp delSp modSp mod">
+        <pc:chgData name="Andre Benedetti" userId="60466d4fc085b17e" providerId="LiveId" clId="{6AE31E5C-6838-415C-9ED3-0CC1084E645F}" dt="2025-12-15T05:32:10.034" v="54" actId="20577"/>
+        <pc:sldMkLst>
+          <pc:docMk/>
+          <pc:sldMk cId="4062542544" sldId="256"/>
+        </pc:sldMkLst>
+        <pc:spChg chg="mod">
+          <ac:chgData name="Andre Benedetti" userId="60466d4fc085b17e" providerId="LiveId" clId="{6AE31E5C-6838-415C-9ED3-0CC1084E645F}" dt="2025-12-15T05:30:12.830" v="3" actId="20577"/>
+          <ac:spMkLst>
+            <pc:docMk/>
+            <pc:sldMk cId="4062542544" sldId="256"/>
+            <ac:spMk id="5" creationId="{846D6EB8-D1AB-4321-9D81-4F4F8C4A2AAF}"/>
+          </ac:spMkLst>
+        </pc:spChg>
+        <pc:spChg chg="mod">
+          <ac:chgData name="Andre Benedetti" userId="60466d4fc085b17e" providerId="LiveId" clId="{6AE31E5C-6838-415C-9ED3-0CC1084E645F}" dt="2025-12-15T05:30:17.269" v="7" actId="20577"/>
+          <ac:spMkLst>
+            <pc:docMk/>
+            <pc:sldMk cId="4062542544" sldId="256"/>
+            <ac:spMk id="6" creationId="{88F1D805-60EF-864E-0D75-E154EA0781D6}"/>
+          </ac:spMkLst>
+        </pc:spChg>
+        <pc:spChg chg="mod">
+          <ac:chgData name="Andre Benedetti" userId="60466d4fc085b17e" providerId="LiveId" clId="{6AE31E5C-6838-415C-9ED3-0CC1084E645F}" dt="2025-12-15T05:30:19.920" v="11" actId="20577"/>
+          <ac:spMkLst>
+            <pc:docMk/>
+            <pc:sldMk cId="4062542544" sldId="256"/>
+            <ac:spMk id="7" creationId="{8121AEB7-F25A-E4CE-88EA-B1E1772849CD}"/>
+          </ac:spMkLst>
+        </pc:spChg>
+        <pc:spChg chg="mod">
+          <ac:chgData name="Andre Benedetti" userId="60466d4fc085b17e" providerId="LiveId" clId="{6AE31E5C-6838-415C-9ED3-0CC1084E645F}" dt="2025-12-15T05:30:22.152" v="15" actId="20577"/>
+          <ac:spMkLst>
+            <pc:docMk/>
+            <pc:sldMk cId="4062542544" sldId="256"/>
+            <ac:spMk id="8" creationId="{3E902A89-0753-C7C7-1205-6EF98590D2FA}"/>
+          </ac:spMkLst>
+        </pc:spChg>
+        <pc:spChg chg="add mod">
+          <ac:chgData name="Andre Benedetti" userId="60466d4fc085b17e" providerId="LiveId" clId="{6AE31E5C-6838-415C-9ED3-0CC1084E645F}" dt="2025-12-15T05:31:43.493" v="32" actId="1076"/>
+          <ac:spMkLst>
+            <pc:docMk/>
+            <pc:sldMk cId="4062542544" sldId="256"/>
+            <ac:spMk id="15" creationId="{83382DBF-2F96-97C9-FC3A-4F38EC26A10E}"/>
+          </ac:spMkLst>
+        </pc:spChg>
+        <pc:spChg chg="add mod">
+          <ac:chgData name="Andre Benedetti" userId="60466d4fc085b17e" providerId="LiveId" clId="{6AE31E5C-6838-415C-9ED3-0CC1084E645F}" dt="2025-12-15T05:31:53.516" v="41" actId="20577"/>
+          <ac:spMkLst>
+            <pc:docMk/>
+            <pc:sldMk cId="4062542544" sldId="256"/>
+            <ac:spMk id="18" creationId="{3EBAA849-E940-04A6-0260-F1BAF974676B}"/>
+          </ac:spMkLst>
+        </pc:spChg>
+        <pc:spChg chg="add mod">
+          <ac:chgData name="Andre Benedetti" userId="60466d4fc085b17e" providerId="LiveId" clId="{6AE31E5C-6838-415C-9ED3-0CC1084E645F}" dt="2025-12-15T05:32:10.034" v="54" actId="20577"/>
+          <ac:spMkLst>
+            <pc:docMk/>
+            <pc:sldMk cId="4062542544" sldId="256"/>
+            <ac:spMk id="21" creationId="{8B1A246A-805C-82E6-5BCE-B7E1C654F548}"/>
+          </ac:spMkLst>
+        </pc:spChg>
+        <pc:grpChg chg="del">
+          <ac:chgData name="Andre Benedetti" userId="60466d4fc085b17e" providerId="LiveId" clId="{6AE31E5C-6838-415C-9ED3-0CC1084E645F}" dt="2025-12-15T05:31:10.881" v="21" actId="478"/>
+          <ac:grpSpMkLst>
+            <pc:docMk/>
+            <pc:sldMk cId="4062542544" sldId="256"/>
+            <ac:grpSpMk id="42" creationId="{86477A7A-9045-73DF-4DA1-778CC07217CD}"/>
+          </ac:grpSpMkLst>
+        </pc:grpChg>
+        <pc:grpChg chg="del">
+          <ac:chgData name="Andre Benedetti" userId="60466d4fc085b17e" providerId="LiveId" clId="{6AE31E5C-6838-415C-9ED3-0CC1084E645F}" dt="2025-12-15T05:31:47.099" v="33" actId="478"/>
+          <ac:grpSpMkLst>
+            <pc:docMk/>
+            <pc:sldMk cId="4062542544" sldId="256"/>
+            <ac:grpSpMk id="43" creationId="{AD56010E-3610-B201-75E6-13FB4CA1A47F}"/>
+          </ac:grpSpMkLst>
+        </pc:grpChg>
+        <pc:grpChg chg="del">
+          <ac:chgData name="Andre Benedetti" userId="60466d4fc085b17e" providerId="LiveId" clId="{6AE31E5C-6838-415C-9ED3-0CC1084E645F}" dt="2025-12-15T05:32:02.111" v="44" actId="478"/>
+          <ac:grpSpMkLst>
+            <pc:docMk/>
+            <pc:sldMk cId="4062542544" sldId="256"/>
+            <ac:grpSpMk id="44" creationId="{BDDBD87E-6D32-CE7B-C6CF-C0447AEFEE04}"/>
+          </ac:grpSpMkLst>
+        </pc:grpChg>
+        <pc:picChg chg="add mod">
+          <ac:chgData name="Andre Benedetti" userId="60466d4fc085b17e" providerId="LiveId" clId="{6AE31E5C-6838-415C-9ED3-0CC1084E645F}" dt="2025-12-15T05:31:13.088" v="22" actId="1076"/>
+          <ac:picMkLst>
+            <pc:docMk/>
+            <pc:sldMk cId="4062542544" sldId="256"/>
+            <ac:picMk id="3" creationId="{C7AD4177-C306-1309-7AF2-601E3C78ECC3}"/>
+          </ac:picMkLst>
+        </pc:picChg>
+        <pc:picChg chg="add mod">
+          <ac:chgData name="Andre Benedetti" userId="60466d4fc085b17e" providerId="LiveId" clId="{6AE31E5C-6838-415C-9ED3-0CC1084E645F}" dt="2025-12-15T05:31:51.754" v="35" actId="1076"/>
+          <ac:picMkLst>
+            <pc:docMk/>
+            <pc:sldMk cId="4062542544" sldId="256"/>
+            <ac:picMk id="17" creationId="{850967F1-A5ED-644C-E7AB-9F6AA0F4066E}"/>
+          </ac:picMkLst>
+        </pc:picChg>
+        <pc:picChg chg="add mod">
+          <ac:chgData name="Andre Benedetti" userId="60466d4fc085b17e" providerId="LiveId" clId="{6AE31E5C-6838-415C-9ED3-0CC1084E645F}" dt="2025-12-15T05:32:05.670" v="45" actId="1076"/>
+          <ac:picMkLst>
+            <pc:docMk/>
+            <pc:sldMk cId="4062542544" sldId="256"/>
+            <ac:picMk id="20" creationId="{B233BB52-FCFE-E1D7-BECE-F400FA1ACDE4}"/>
+          </ac:picMkLst>
+        </pc:picChg>
+        <pc:cxnChg chg="mod">
+          <ac:chgData name="Andre Benedetti" userId="60466d4fc085b17e" providerId="LiveId" clId="{6AE31E5C-6838-415C-9ED3-0CC1084E645F}" dt="2025-12-15T05:31:10.881" v="21" actId="478"/>
+          <ac:cxnSpMkLst>
+            <pc:docMk/>
+            <pc:sldMk cId="4062542544" sldId="256"/>
+            <ac:cxnSpMk id="16" creationId="{1DA09DC5-FD56-DB88-6DC9-F20FDCBC6F0F}"/>
+          </ac:cxnSpMkLst>
+        </pc:cxnChg>
+        <pc:cxnChg chg="mod">
+          <ac:chgData name="Andre Benedetti" userId="60466d4fc085b17e" providerId="LiveId" clId="{6AE31E5C-6838-415C-9ED3-0CC1084E645F}" dt="2025-12-15T05:31:47.099" v="33" actId="478"/>
+          <ac:cxnSpMkLst>
+            <pc:docMk/>
+            <pc:sldMk cId="4062542544" sldId="256"/>
+            <ac:cxnSpMk id="19" creationId="{B18D36DA-095D-F579-A343-A98B125BBDCA}"/>
+          </ac:cxnSpMkLst>
+        </pc:cxnChg>
+        <pc:cxnChg chg="mod">
+          <ac:chgData name="Andre Benedetti" userId="60466d4fc085b17e" providerId="LiveId" clId="{6AE31E5C-6838-415C-9ED3-0CC1084E645F}" dt="2025-12-15T05:31:10.881" v="21" actId="478"/>
+          <ac:cxnSpMkLst>
+            <pc:docMk/>
+            <pc:sldMk cId="4062542544" sldId="256"/>
+            <ac:cxnSpMk id="22" creationId="{CB8084EA-5C23-3442-62EC-E85153F50D1B}"/>
+          </ac:cxnSpMkLst>
+        </pc:cxnChg>
+        <pc:cxnChg chg="mod">
+          <ac:chgData name="Andre Benedetti" userId="60466d4fc085b17e" providerId="LiveId" clId="{6AE31E5C-6838-415C-9ED3-0CC1084E645F}" dt="2025-12-15T05:31:47.099" v="33" actId="478"/>
+          <ac:cxnSpMkLst>
+            <pc:docMk/>
+            <pc:sldMk cId="4062542544" sldId="256"/>
+            <ac:cxnSpMk id="25" creationId="{6EC3CE52-C515-55F6-EA86-0A04CBC23690}"/>
+          </ac:cxnSpMkLst>
+        </pc:cxnChg>
+        <pc:cxnChg chg="mod">
+          <ac:chgData name="Andre Benedetti" userId="60466d4fc085b17e" providerId="LiveId" clId="{6AE31E5C-6838-415C-9ED3-0CC1084E645F}" dt="2025-12-15T05:31:47.099" v="33" actId="478"/>
+          <ac:cxnSpMkLst>
+            <pc:docMk/>
+            <pc:sldMk cId="4062542544" sldId="256"/>
+            <ac:cxnSpMk id="28" creationId="{18566BA4-EB57-7A93-BAF8-2A8AB0A8F834}"/>
+          </ac:cxnSpMkLst>
+        </pc:cxnChg>
+        <pc:cxnChg chg="mod">
+          <ac:chgData name="Andre Benedetti" userId="60466d4fc085b17e" providerId="LiveId" clId="{6AE31E5C-6838-415C-9ED3-0CC1084E645F}" dt="2025-12-15T05:32:02.111" v="44" actId="478"/>
+          <ac:cxnSpMkLst>
+            <pc:docMk/>
+            <pc:sldMk cId="4062542544" sldId="256"/>
+            <ac:cxnSpMk id="31" creationId="{018EF25E-2EE2-045C-5C65-2825D4848D60}"/>
+          </ac:cxnSpMkLst>
+        </pc:cxnChg>
+        <pc:cxnChg chg="mod">
+          <ac:chgData name="Andre Benedetti" userId="60466d4fc085b17e" providerId="LiveId" clId="{6AE31E5C-6838-415C-9ED3-0CC1084E645F}" dt="2025-12-15T05:32:02.111" v="44" actId="478"/>
+          <ac:cxnSpMkLst>
+            <pc:docMk/>
+            <pc:sldMk cId="4062542544" sldId="256"/>
+            <ac:cxnSpMk id="34" creationId="{0369E039-6B4F-69C8-3779-22EB6B8300F4}"/>
+          </ac:cxnSpMkLst>
+        </pc:cxnChg>
+        <pc:cxnChg chg="mod">
+          <ac:chgData name="Andre Benedetti" userId="60466d4fc085b17e" providerId="LiveId" clId="{6AE31E5C-6838-415C-9ED3-0CC1084E645F}" dt="2025-12-15T05:32:02.111" v="44" actId="478"/>
+          <ac:cxnSpMkLst>
+            <pc:docMk/>
+            <pc:sldMk cId="4062542544" sldId="256"/>
+            <ac:cxnSpMk id="37" creationId="{DF0632E1-491C-2B02-68E1-AEED923F14A8}"/>
+          </ac:cxnSpMkLst>
+        </pc:cxnChg>
+        <pc:cxnChg chg="mod">
+          <ac:chgData name="Andre Benedetti" userId="60466d4fc085b17e" providerId="LiveId" clId="{6AE31E5C-6838-415C-9ED3-0CC1084E645F}" dt="2025-12-15T05:32:02.111" v="44" actId="478"/>
+          <ac:cxnSpMkLst>
+            <pc:docMk/>
+            <pc:sldMk cId="4062542544" sldId="256"/>
+            <ac:cxnSpMk id="40" creationId="{07AE4FA9-9766-AE8D-8FF0-3EB7BC2992EE}"/>
+          </ac:cxnSpMkLst>
+        </pc:cxnChg>
+      </pc:sldChg>
+    </pc:docChg>
+  </pc:docChgLst>
+</pc:chgInfo>
+</file>
+
+<file path=ppt/notesMasters/notesMaster1.xml><?xml version="1.0" encoding="utf-8"?>
+<p:notesMaster xmlns:a="http://schemas.openxmlformats.org/drawingml/2006/main" xmlns:r="http://schemas.openxmlformats.org/officeDocument/2006/relationships" xmlns:p="http://schemas.openxmlformats.org/presentationml/2006/main">
+  <p:cSld>
+    <p:bg>
+      <p:bgRef idx="1001">
+        <a:schemeClr val="bg1"/>
+      </p:bgRef>
+    </p:bg>
+    <p:spTree>
+      <p:nvGrpSpPr>
+        <p:cNvPr id="1" name=""/>
+        <p:cNvGrpSpPr/>
+        <p:nvPr/>
+      </p:nvGrpSpPr>
+      <p:grpSpPr>
+        <a:xfrm>
+          <a:off x="0" y="0"/>
+          <a:ext cx="0" cy="0"/>
+          <a:chOff x="0" y="0"/>
+          <a:chExt cx="0" cy="0"/>
+        </a:xfrm>
+      </p:grpSpPr>
+      <p:sp>
+        <p:nvSpPr>
+          <p:cNvPr id="2" name="Header Placeholder 1"/>
+          <p:cNvSpPr>
+            <a:spLocks noGrp="1"/>
+          </p:cNvSpPr>
+          <p:nvPr>
+            <p:ph type="hdr" sz="quarter"/>
+          </p:nvPr>
+        </p:nvSpPr>
+        <p:spPr>
+          <a:xfrm>
+            <a:off x="0" y="0"/>
+            <a:ext cx="2971800" cy="458788"/>
+          </a:xfrm>
+          <a:prstGeom prst="rect">
+            <a:avLst/>
+          </a:prstGeom>
+        </p:spPr>
+        <p:txBody>
+          <a:bodyPr vert="horz" lIns="91440" tIns="45720" rIns="91440" bIns="45720" rtlCol="0"/>
+          <a:lstStyle>
+            <a:lvl1pPr algn="l">
+              <a:defRPr sz="1200"/>
+            </a:lvl1pPr>
+          </a:lstStyle>
+          <a:p>
+            <a:endParaRPr lang="pt-BR"/>
+          </a:p>
+        </p:txBody>
+      </p:sp>
+      <p:sp>
+        <p:nvSpPr>
+          <p:cNvPr id="3" name="Date Placeholder 2"/>
+          <p:cNvSpPr>
+            <a:spLocks noGrp="1"/>
+          </p:cNvSpPr>
+          <p:nvPr>
+            <p:ph type="dt" idx="1"/>
+          </p:nvPr>
+        </p:nvSpPr>
+        <p:spPr>
+          <a:xfrm>
+            <a:off x="3884613" y="0"/>
+            <a:ext cx="2971800" cy="458788"/>
+          </a:xfrm>
+          <a:prstGeom prst="rect">
+            <a:avLst/>
+          </a:prstGeom>
+        </p:spPr>
+        <p:txBody>
+          <a:bodyPr vert="horz" lIns="91440" tIns="45720" rIns="91440" bIns="45720" rtlCol="0"/>
+          <a:lstStyle>
+            <a:lvl1pPr algn="r">
+              <a:defRPr sz="1200"/>
+            </a:lvl1pPr>
+          </a:lstStyle>
+          <a:p>
+            <a:fld id="{6D4DA16D-8285-40B3-86A9-595085AE0789}" type="datetimeFigureOut">
+              <a:rPr lang="pt-BR" smtClean="0"/>
+              <a:t>14/12/2025</a:t>
+            </a:fld>
+            <a:endParaRPr lang="pt-BR"/>
+          </a:p>
+        </p:txBody>
+      </p:sp>
+      <p:sp>
+        <p:nvSpPr>
+          <p:cNvPr id="4" name="Slide Image Placeholder 3"/>
+          <p:cNvSpPr>
+            <a:spLocks noGrp="1" noRot="1" noChangeAspect="1"/>
+          </p:cNvSpPr>
+          <p:nvPr>
+            <p:ph type="sldImg" idx="2"/>
+          </p:nvPr>
+        </p:nvSpPr>
+        <p:spPr>
+          <a:xfrm>
+            <a:off x="685800" y="1143000"/>
+            <a:ext cx="5486400" cy="3086100"/>
+          </a:xfrm>
+          <a:prstGeom prst="rect">
+            <a:avLst/>
+          </a:prstGeom>
+          <a:noFill/>
+          <a:ln w="12700">
+            <a:solidFill>
+              <a:prstClr val="black"/>
+            </a:solidFill>
+          </a:ln>
+        </p:spPr>
+        <p:txBody>
+          <a:bodyPr vert="horz" lIns="91440" tIns="45720" rIns="91440" bIns="45720" rtlCol="0" anchor="ctr"/>
+          <a:lstStyle/>
+          <a:p>
+            <a:endParaRPr lang="pt-BR"/>
+          </a:p>
+        </p:txBody>
+      </p:sp>
+      <p:sp>
+        <p:nvSpPr>
+          <p:cNvPr id="5" name="Notes Placeholder 4"/>
+          <p:cNvSpPr>
+            <a:spLocks noGrp="1"/>
+          </p:cNvSpPr>
+          <p:nvPr>
+            <p:ph type="body" sz="quarter" idx="3"/>
+          </p:nvPr>
+        </p:nvSpPr>
+        <p:spPr>
+          <a:xfrm>
+            <a:off x="685800" y="4400550"/>
+            <a:ext cx="5486400" cy="3600450"/>
+          </a:xfrm>
+          <a:prstGeom prst="rect">
+            <a:avLst/>
+          </a:prstGeom>
+        </p:spPr>
+        <p:txBody>
+          <a:bodyPr vert="horz" lIns="91440" tIns="45720" rIns="91440" bIns="45720" rtlCol="0"/>
+          <a:lstStyle/>
+          <a:p>
+            <a:pPr lvl="0"/>
+            <a:r>
+              <a:rPr lang="en-US"/>
+              <a:t>Click to edit Master text styles</a:t>
+            </a:r>
+          </a:p>
+          <a:p>
+            <a:pPr lvl="1"/>
+            <a:r>
+              <a:rPr lang="en-US"/>
+              <a:t>Second level</a:t>
+            </a:r>
+          </a:p>
+          <a:p>
+            <a:pPr lvl="2"/>
+            <a:r>
+              <a:rPr lang="en-US"/>
+              <a:t>Third level</a:t>
+            </a:r>
+          </a:p>
+          <a:p>
+            <a:pPr lvl="3"/>
+            <a:r>
+              <a:rPr lang="en-US"/>
+              <a:t>Fourth level</a:t>
+            </a:r>
+          </a:p>
+          <a:p>
+            <a:pPr lvl="4"/>
+            <a:r>
+              <a:rPr lang="en-US"/>
+              <a:t>Fifth level</a:t>
+            </a:r>
+            <a:endParaRPr lang="pt-BR"/>
+          </a:p>
+        </p:txBody>
+      </p:sp>
+      <p:sp>
+        <p:nvSpPr>
+          <p:cNvPr id="6" name="Footer Placeholder 5"/>
+          <p:cNvSpPr>
+            <a:spLocks noGrp="1"/>
+          </p:cNvSpPr>
+          <p:nvPr>
+            <p:ph type="ftr" sz="quarter" idx="4"/>
+          </p:nvPr>
+        </p:nvSpPr>
+        <p:spPr>
+          <a:xfrm>
+            <a:off x="0" y="8685213"/>
+            <a:ext cx="2971800" cy="458787"/>
+          </a:xfrm>
+          <a:prstGeom prst="rect">
+            <a:avLst/>
+          </a:prstGeom>
+        </p:spPr>
+        <p:txBody>
+          <a:bodyPr vert="horz" lIns="91440" tIns="45720" rIns="91440" bIns="45720" rtlCol="0" anchor="b"/>
+          <a:lstStyle>
+            <a:lvl1pPr algn="l">
+              <a:defRPr sz="1200"/>
+            </a:lvl1pPr>
+          </a:lstStyle>
+          <a:p>
+            <a:endParaRPr lang="pt-BR"/>
+          </a:p>
+        </p:txBody>
+      </p:sp>
+      <p:sp>
+        <p:nvSpPr>
+          <p:cNvPr id="7" name="Slide Number Placeholder 6"/>
+          <p:cNvSpPr>
+            <a:spLocks noGrp="1"/>
+          </p:cNvSpPr>
+          <p:nvPr>
+            <p:ph type="sldNum" sz="quarter" idx="5"/>
+          </p:nvPr>
+        </p:nvSpPr>
+        <p:spPr>
+          <a:xfrm>
+            <a:off x="3884613" y="8685213"/>
+            <a:ext cx="2971800" cy="458787"/>
+          </a:xfrm>
+          <a:prstGeom prst="rect">
+            <a:avLst/>
+          </a:prstGeom>
+        </p:spPr>
+        <p:txBody>
+          <a:bodyPr vert="horz" lIns="91440" tIns="45720" rIns="91440" bIns="45720" rtlCol="0" anchor="b"/>
+          <a:lstStyle>
+            <a:lvl1pPr algn="r">
+              <a:defRPr sz="1200"/>
+            </a:lvl1pPr>
+          </a:lstStyle>
+          <a:p>
+            <a:fld id="{8B608F8C-2669-43B5-862E-76D3B76B57DE}" type="slidenum">
+              <a:rPr lang="pt-BR" smtClean="0"/>
+              <a:t>‹#›</a:t>
+            </a:fld>
+            <a:endParaRPr lang="pt-BR"/>
+          </a:p>
+        </p:txBody>
+      </p:sp>
+    </p:spTree>
+    <p:extLst>
+      <p:ext uri="{BB962C8B-B14F-4D97-AF65-F5344CB8AC3E}">
+        <p14:creationId xmlns:p14="http://schemas.microsoft.com/office/powerpoint/2010/main" val="2923304593"/>
+      </p:ext>
+    </p:extLst>
+  </p:cSld>
+  <p:clrMap bg1="lt1" tx1="dk1" bg2="lt2" tx2="dk2" accent1="accent1" accent2="accent2" accent3="accent3" accent4="accent4" accent5="accent5" accent6="accent6" hlink="hlink" folHlink="folHlink"/>
+  <p:notesStyle>
+    <a:lvl1pPr marL="0" algn="l" defTabSz="914400" rtl="0" eaLnBrk="1" latinLnBrk="0" hangingPunct="1">
+      <a:defRPr sz="1200" kern="1200">
+        <a:solidFill>
+          <a:schemeClr val="tx1"/>
+        </a:solidFill>
+        <a:latin typeface="+mn-lt"/>
+        <a:ea typeface="+mn-ea"/>
+        <a:cs typeface="+mn-cs"/>
+      </a:defRPr>
+    </a:lvl1pPr>
+    <a:lvl2pPr marL="457200" algn="l" defTabSz="914400" rtl="0" eaLnBrk="1" latinLnBrk="0" hangingPunct="1">
+      <a:defRPr sz="1200" kern="1200">
+        <a:solidFill>
+          <a:schemeClr val="tx1"/>
+        </a:solidFill>
+        <a:latin typeface="+mn-lt"/>
+        <a:ea typeface="+mn-ea"/>
+        <a:cs typeface="+mn-cs"/>
+      </a:defRPr>
+    </a:lvl2pPr>
+    <a:lvl3pPr marL="914400" algn="l" defTabSz="914400" rtl="0" eaLnBrk="1" latinLnBrk="0" hangingPunct="1">
+      <a:defRPr sz="1200" kern="1200">
+        <a:solidFill>
+          <a:schemeClr val="tx1"/>
+        </a:solidFill>
+        <a:latin typeface="+mn-lt"/>
+        <a:ea typeface="+mn-ea"/>
+        <a:cs typeface="+mn-cs"/>
+      </a:defRPr>
+    </a:lvl3pPr>
+    <a:lvl4pPr marL="1371600" algn="l" defTabSz="914400" rtl="0" eaLnBrk="1" latinLnBrk="0" hangingPunct="1">
+      <a:defRPr sz="1200" kern="1200">
+        <a:solidFill>
+          <a:schemeClr val="tx1"/>
+        </a:solidFill>
+        <a:latin typeface="+mn-lt"/>
+        <a:ea typeface="+mn-ea"/>
+        <a:cs typeface="+mn-cs"/>
+      </a:defRPr>
+    </a:lvl4pPr>
+    <a:lvl5pPr marL="1828800" algn="l" defTabSz="914400" rtl="0" eaLnBrk="1" latinLnBrk="0" hangingPunct="1">
+      <a:defRPr sz="1200" kern="1200">
+        <a:solidFill>
+          <a:schemeClr val="tx1"/>
+        </a:solidFill>
+        <a:latin typeface="+mn-lt"/>
+        <a:ea typeface="+mn-ea"/>
+        <a:cs typeface="+mn-cs"/>
+      </a:defRPr>
+    </a:lvl5pPr>
+    <a:lvl6pPr marL="2286000" algn="l" defTabSz="914400" rtl="0" eaLnBrk="1" latinLnBrk="0" hangingPunct="1">
+      <a:defRPr sz="1200" kern="1200">
+        <a:solidFill>
+          <a:schemeClr val="tx1"/>
+        </a:solidFill>
+        <a:latin typeface="+mn-lt"/>
+        <a:ea typeface="+mn-ea"/>
+        <a:cs typeface="+mn-cs"/>
+      </a:defRPr>
+    </a:lvl6pPr>
+    <a:lvl7pPr marL="2743200" algn="l" defTabSz="914400" rtl="0" eaLnBrk="1" latinLnBrk="0" hangingPunct="1">
+      <a:defRPr sz="1200" kern="1200">
+        <a:solidFill>
+          <a:schemeClr val="tx1"/>
+        </a:solidFill>
+        <a:latin typeface="+mn-lt"/>
+        <a:ea typeface="+mn-ea"/>
+        <a:cs typeface="+mn-cs"/>
+      </a:defRPr>
+    </a:lvl7pPr>
+    <a:lvl8pPr marL="3200400" algn="l" defTabSz="914400" rtl="0" eaLnBrk="1" latinLnBrk="0" hangingPunct="1">
+      <a:defRPr sz="1200" kern="1200">
+        <a:solidFill>
+          <a:schemeClr val="tx1"/>
+        </a:solidFill>
+        <a:latin typeface="+mn-lt"/>
+        <a:ea typeface="+mn-ea"/>
+        <a:cs typeface="+mn-cs"/>
+      </a:defRPr>
+    </a:lvl8pPr>
+    <a:lvl9pPr marL="3657600" algn="l" defTabSz="914400" rtl="0" eaLnBrk="1" latinLnBrk="0" hangingPunct="1">
+      <a:defRPr sz="1200" kern="1200">
+        <a:solidFill>
+          <a:schemeClr val="tx1"/>
+        </a:solidFill>
+        <a:latin typeface="+mn-lt"/>
+        <a:ea typeface="+mn-ea"/>
+        <a:cs typeface="+mn-cs"/>
+      </a:defRPr>
+    </a:lvl9pPr>
+  </p:notesStyle>
+</p:notesMaster>
+</file>
+
+<file path=ppt/notesSlides/notesSlide1.xml><?xml version="1.0" encoding="utf-8"?>
+<p:notes xmlns:a="http://schemas.openxmlformats.org/drawingml/2006/main" xmlns:r="http://schemas.openxmlformats.org/officeDocument/2006/relationships" xmlns:p="http://schemas.openxmlformats.org/presentationml/2006/main">
+  <p:cSld>
+    <p:spTree>
+      <p:nvGrpSpPr>
+        <p:cNvPr id="1" name=""/>
+        <p:cNvGrpSpPr/>
+        <p:nvPr/>
+      </p:nvGrpSpPr>
+      <p:grpSpPr>
+        <a:xfrm>
+          <a:off x="0" y="0"/>
+          <a:ext cx="0" cy="0"/>
+          <a:chOff x="0" y="0"/>
+          <a:chExt cx="0" cy="0"/>
+        </a:xfrm>
+      </p:grpSpPr>
+      <p:sp>
+        <p:nvSpPr>
+          <p:cNvPr id="2" name="Slide Image Placeholder 1"/>
+          <p:cNvSpPr>
+            <a:spLocks noGrp="1" noRot="1" noChangeAspect="1"/>
+          </p:cNvSpPr>
+          <p:nvPr>
+            <p:ph type="sldImg"/>
+          </p:nvPr>
+        </p:nvSpPr>
+        <p:spPr/>
+      </p:sp>
+      <p:sp>
+        <p:nvSpPr>
+          <p:cNvPr id="3" name="Notes Placeholder 2"/>
+          <p:cNvSpPr>
+            <a:spLocks noGrp="1"/>
+          </p:cNvSpPr>
+          <p:nvPr>
+            <p:ph type="body" idx="1"/>
+          </p:nvPr>
+        </p:nvSpPr>
+        <p:spPr/>
+        <p:txBody>
+          <a:bodyPr/>
+          <a:lstStyle/>
+          <a:p>
+            <a:endParaRPr lang="pt-BR" dirty="0"/>
+          </a:p>
+        </p:txBody>
+      </p:sp>
+      <p:sp>
+        <p:nvSpPr>
+          <p:cNvPr id="4" name="Slide Number Placeholder 3"/>
+          <p:cNvSpPr>
+            <a:spLocks noGrp="1"/>
+          </p:cNvSpPr>
+          <p:nvPr>
+            <p:ph type="sldNum" sz="quarter" idx="5"/>
+          </p:nvPr>
+        </p:nvSpPr>
+        <p:spPr/>
+        <p:txBody>
+          <a:bodyPr/>
+          <a:lstStyle/>
+          <a:p>
+            <a:fld id="{8B608F8C-2669-43B5-862E-76D3B76B57DE}" type="slidenum">
+              <a:rPr lang="pt-BR" smtClean="0"/>
+              <a:t>1</a:t>
+            </a:fld>
+            <a:endParaRPr lang="pt-BR"/>
+          </a:p>
+        </p:txBody>
+      </p:sp>
+    </p:spTree>
+    <p:extLst>
+      <p:ext uri="{BB962C8B-B14F-4D97-AF65-F5344CB8AC3E}">
+        <p14:creationId xmlns:p14="http://schemas.microsoft.com/office/powerpoint/2010/main" val="4254653683"/>
+      </p:ext>
+    </p:extLst>
+  </p:cSld>
+  <p:clrMapOvr>
+    <a:masterClrMapping/>
+  </p:clrMapOvr>
+</p:notes>
 </file>
 
 <file path=ppt/slideLayouts/slideLayout1.xml><?xml version="1.0" encoding="utf-8"?>
@@ -3437,8 +4084,12 @@
           <a:p>
             <a:pPr algn="ctr"/>
             <a:r>
+              <a:rPr lang="pt-BR" dirty="0" err="1"/>
+              <a:t>Edit</a:t>
+            </a:r>
+            <a:r>
               <a:rPr lang="pt-BR" dirty="0"/>
-              <a:t>Input </a:t>
+              <a:t> </a:t>
             </a:r>
             <a:r>
               <a:rPr lang="pt-BR" dirty="0" err="1"/>
@@ -3503,7 +4154,7 @@
             <a:pPr algn="ctr"/>
             <a:r>
               <a:rPr lang="pt-BR" dirty="0" err="1"/>
-              <a:t>Read</a:t>
+              <a:t>Edit</a:t>
             </a:r>
             <a:r>
               <a:rPr lang="pt-BR" dirty="0"/>
@@ -3571,8 +4222,12 @@
           <a:p>
             <a:pPr algn="ctr"/>
             <a:r>
+              <a:rPr lang="pt-BR" dirty="0" err="1"/>
+              <a:t>Edit</a:t>
+            </a:r>
+            <a:r>
               <a:rPr lang="pt-BR" dirty="0"/>
-              <a:t>Input </a:t>
+              <a:t> </a:t>
             </a:r>
             <a:r>
               <a:rPr lang="pt-BR" dirty="0" err="1"/>
@@ -3637,7 +4292,7 @@
             <a:pPr algn="ctr"/>
             <a:r>
               <a:rPr lang="pt-BR" dirty="0" err="1"/>
-              <a:t>Read</a:t>
+              <a:t>Edit</a:t>
             </a:r>
             <a:r>
               <a:rPr lang="pt-BR" dirty="0"/>
@@ -3659,323 +4314,6 @@
           </a:p>
         </p:txBody>
       </p:sp>
-      <p:grpSp>
-        <p:nvGrpSpPr>
-          <p:cNvPr id="42" name="Group 41">
-            <a:extLst>
-              <a:ext uri="{FF2B5EF4-FFF2-40B4-BE49-F238E27FC236}">
-                <a16:creationId xmlns:a16="http://schemas.microsoft.com/office/drawing/2014/main" id="{86477A7A-9045-73DF-4DA1-778CC07217CD}"/>
-              </a:ext>
-            </a:extLst>
-          </p:cNvPr>
-          <p:cNvGrpSpPr/>
-          <p:nvPr/>
-        </p:nvGrpSpPr>
-        <p:grpSpPr>
-          <a:xfrm>
-            <a:off x="2258060" y="939097"/>
-            <a:ext cx="1358899" cy="1232933"/>
-            <a:chOff x="1634067" y="805179"/>
-            <a:chExt cx="1358899" cy="1232933"/>
-          </a:xfrm>
-        </p:grpSpPr>
-        <p:sp>
-          <p:nvSpPr>
-            <p:cNvPr id="9" name="Smiley Face 8">
-              <a:extLst>
-                <a:ext uri="{FF2B5EF4-FFF2-40B4-BE49-F238E27FC236}">
-                  <a16:creationId xmlns:a16="http://schemas.microsoft.com/office/drawing/2014/main" id="{E8A51C07-6035-3017-3872-A3352ACE3684}"/>
-                </a:ext>
-              </a:extLst>
-            </p:cNvPr>
-            <p:cNvSpPr/>
-            <p:nvPr/>
-          </p:nvSpPr>
-          <p:spPr>
-            <a:xfrm>
-              <a:off x="1634067" y="805179"/>
-              <a:ext cx="1236133" cy="863601"/>
-            </a:xfrm>
-            <a:prstGeom prst="smileyFace">
-              <a:avLst/>
-            </a:prstGeom>
-            <a:ln>
-              <a:solidFill>
-                <a:schemeClr val="tx1"/>
-              </a:solidFill>
-            </a:ln>
-          </p:spPr>
-          <p:style>
-            <a:lnRef idx="2">
-              <a:schemeClr val="accent6"/>
-            </a:lnRef>
-            <a:fillRef idx="1">
-              <a:schemeClr val="lt1"/>
-            </a:fillRef>
-            <a:effectRef idx="0">
-              <a:schemeClr val="accent6"/>
-            </a:effectRef>
-            <a:fontRef idx="minor">
-              <a:schemeClr val="dk1"/>
-            </a:fontRef>
-          </p:style>
-          <p:txBody>
-            <a:bodyPr rtlCol="0" anchor="ctr"/>
-            <a:lstStyle/>
-            <a:p>
-              <a:pPr algn="ctr"/>
-              <a:endParaRPr lang="pt-BR" dirty="0"/>
-            </a:p>
-          </p:txBody>
-        </p:sp>
-        <p:sp>
-          <p:nvSpPr>
-            <p:cNvPr id="10" name="TextBox 9">
-              <a:extLst>
-                <a:ext uri="{FF2B5EF4-FFF2-40B4-BE49-F238E27FC236}">
-                  <a16:creationId xmlns:a16="http://schemas.microsoft.com/office/drawing/2014/main" id="{7039A977-165D-3C00-ACC5-414E4F004C59}"/>
-                </a:ext>
-              </a:extLst>
-            </p:cNvPr>
-            <p:cNvSpPr txBox="1"/>
-            <p:nvPr/>
-          </p:nvSpPr>
-          <p:spPr>
-            <a:xfrm>
-              <a:off x="1756833" y="1668780"/>
-              <a:ext cx="1236133" cy="369332"/>
-            </a:xfrm>
-            <a:prstGeom prst="rect">
-              <a:avLst/>
-            </a:prstGeom>
-            <a:noFill/>
-          </p:spPr>
-          <p:txBody>
-            <a:bodyPr wrap="square" rtlCol="0">
-              <a:spAutoFit/>
-            </a:bodyPr>
-            <a:lstStyle/>
-            <a:p>
-              <a:r>
-                <a:rPr lang="pt-BR" dirty="0" err="1"/>
-                <a:t>Patient</a:t>
-              </a:r>
-              <a:endParaRPr lang="pt-BR" dirty="0"/>
-            </a:p>
-          </p:txBody>
-        </p:sp>
-      </p:grpSp>
-      <p:grpSp>
-        <p:nvGrpSpPr>
-          <p:cNvPr id="43" name="Group 42">
-            <a:extLst>
-              <a:ext uri="{FF2B5EF4-FFF2-40B4-BE49-F238E27FC236}">
-                <a16:creationId xmlns:a16="http://schemas.microsoft.com/office/drawing/2014/main" id="{AD56010E-3610-B201-75E6-13FB4CA1A47F}"/>
-              </a:ext>
-            </a:extLst>
-          </p:cNvPr>
-          <p:cNvGrpSpPr/>
-          <p:nvPr/>
-        </p:nvGrpSpPr>
-        <p:grpSpPr>
-          <a:xfrm>
-            <a:off x="2126827" y="3365500"/>
-            <a:ext cx="1358899" cy="1232933"/>
-            <a:chOff x="1634067" y="3742266"/>
-            <a:chExt cx="1358899" cy="1232933"/>
-          </a:xfrm>
-        </p:grpSpPr>
-        <p:sp>
-          <p:nvSpPr>
-            <p:cNvPr id="11" name="Smiley Face 10">
-              <a:extLst>
-                <a:ext uri="{FF2B5EF4-FFF2-40B4-BE49-F238E27FC236}">
-                  <a16:creationId xmlns:a16="http://schemas.microsoft.com/office/drawing/2014/main" id="{50CEFBE6-6E23-6A05-B4B8-2975A61ACDAE}"/>
-                </a:ext>
-              </a:extLst>
-            </p:cNvPr>
-            <p:cNvSpPr/>
-            <p:nvPr/>
-          </p:nvSpPr>
-          <p:spPr>
-            <a:xfrm>
-              <a:off x="1634067" y="3742266"/>
-              <a:ext cx="1236133" cy="863601"/>
-            </a:xfrm>
-            <a:prstGeom prst="smileyFace">
-              <a:avLst/>
-            </a:prstGeom>
-            <a:ln>
-              <a:solidFill>
-                <a:schemeClr val="tx1"/>
-              </a:solidFill>
-            </a:ln>
-          </p:spPr>
-          <p:style>
-            <a:lnRef idx="2">
-              <a:schemeClr val="accent6"/>
-            </a:lnRef>
-            <a:fillRef idx="1">
-              <a:schemeClr val="lt1"/>
-            </a:fillRef>
-            <a:effectRef idx="0">
-              <a:schemeClr val="accent6"/>
-            </a:effectRef>
-            <a:fontRef idx="minor">
-              <a:schemeClr val="dk1"/>
-            </a:fontRef>
-          </p:style>
-          <p:txBody>
-            <a:bodyPr rtlCol="0" anchor="ctr"/>
-            <a:lstStyle/>
-            <a:p>
-              <a:pPr algn="ctr"/>
-              <a:endParaRPr lang="pt-BR" dirty="0"/>
-            </a:p>
-          </p:txBody>
-        </p:sp>
-        <p:sp>
-          <p:nvSpPr>
-            <p:cNvPr id="12" name="TextBox 11">
-              <a:extLst>
-                <a:ext uri="{FF2B5EF4-FFF2-40B4-BE49-F238E27FC236}">
-                  <a16:creationId xmlns:a16="http://schemas.microsoft.com/office/drawing/2014/main" id="{1269CB9D-9B79-548A-0409-4DC9586437E2}"/>
-                </a:ext>
-              </a:extLst>
-            </p:cNvPr>
-            <p:cNvSpPr txBox="1"/>
-            <p:nvPr/>
-          </p:nvSpPr>
-          <p:spPr>
-            <a:xfrm>
-              <a:off x="1756833" y="4605867"/>
-              <a:ext cx="1236133" cy="369332"/>
-            </a:xfrm>
-            <a:prstGeom prst="rect">
-              <a:avLst/>
-            </a:prstGeom>
-            <a:noFill/>
-          </p:spPr>
-          <p:txBody>
-            <a:bodyPr wrap="square" rtlCol="0">
-              <a:spAutoFit/>
-            </a:bodyPr>
-            <a:lstStyle/>
-            <a:p>
-              <a:r>
-                <a:rPr lang="pt-BR" dirty="0" err="1"/>
-                <a:t>Doctor</a:t>
-              </a:r>
-              <a:endParaRPr lang="pt-BR" dirty="0"/>
-            </a:p>
-          </p:txBody>
-        </p:sp>
-      </p:grpSp>
-      <p:grpSp>
-        <p:nvGrpSpPr>
-          <p:cNvPr id="44" name="Group 43">
-            <a:extLst>
-              <a:ext uri="{FF2B5EF4-FFF2-40B4-BE49-F238E27FC236}">
-                <a16:creationId xmlns:a16="http://schemas.microsoft.com/office/drawing/2014/main" id="{BDDBD87E-6D32-CE7B-C6CF-C0447AEFEE04}"/>
-              </a:ext>
-            </a:extLst>
-          </p:cNvPr>
-          <p:cNvGrpSpPr/>
-          <p:nvPr/>
-        </p:nvGrpSpPr>
-        <p:grpSpPr>
-          <a:xfrm>
-            <a:off x="8523395" y="2145267"/>
-            <a:ext cx="1358899" cy="1232933"/>
-            <a:chOff x="9259995" y="2277532"/>
-            <a:chExt cx="1358899" cy="1232933"/>
-          </a:xfrm>
-        </p:grpSpPr>
-        <p:sp>
-          <p:nvSpPr>
-            <p:cNvPr id="13" name="Smiley Face 12">
-              <a:extLst>
-                <a:ext uri="{FF2B5EF4-FFF2-40B4-BE49-F238E27FC236}">
-                  <a16:creationId xmlns:a16="http://schemas.microsoft.com/office/drawing/2014/main" id="{318CA646-1ECA-53AC-F05C-804CF5E688C9}"/>
-                </a:ext>
-              </a:extLst>
-            </p:cNvPr>
-            <p:cNvSpPr/>
-            <p:nvPr/>
-          </p:nvSpPr>
-          <p:spPr>
-            <a:xfrm>
-              <a:off x="9259995" y="2277532"/>
-              <a:ext cx="1236133" cy="863601"/>
-            </a:xfrm>
-            <a:prstGeom prst="smileyFace">
-              <a:avLst/>
-            </a:prstGeom>
-            <a:ln>
-              <a:solidFill>
-                <a:schemeClr val="tx1"/>
-              </a:solidFill>
-            </a:ln>
-          </p:spPr>
-          <p:style>
-            <a:lnRef idx="2">
-              <a:schemeClr val="accent6"/>
-            </a:lnRef>
-            <a:fillRef idx="1">
-              <a:schemeClr val="lt1"/>
-            </a:fillRef>
-            <a:effectRef idx="0">
-              <a:schemeClr val="accent6"/>
-            </a:effectRef>
-            <a:fontRef idx="minor">
-              <a:schemeClr val="dk1"/>
-            </a:fontRef>
-          </p:style>
-          <p:txBody>
-            <a:bodyPr rtlCol="0" anchor="ctr"/>
-            <a:lstStyle/>
-            <a:p>
-              <a:pPr algn="ctr"/>
-              <a:endParaRPr lang="pt-BR" dirty="0"/>
-            </a:p>
-          </p:txBody>
-        </p:sp>
-        <p:sp>
-          <p:nvSpPr>
-            <p:cNvPr id="14" name="TextBox 13">
-              <a:extLst>
-                <a:ext uri="{FF2B5EF4-FFF2-40B4-BE49-F238E27FC236}">
-                  <a16:creationId xmlns:a16="http://schemas.microsoft.com/office/drawing/2014/main" id="{67A70B44-CB79-6AA1-3AD2-8C6F26C3F609}"/>
-                </a:ext>
-              </a:extLst>
-            </p:cNvPr>
-            <p:cNvSpPr txBox="1"/>
-            <p:nvPr/>
-          </p:nvSpPr>
-          <p:spPr>
-            <a:xfrm>
-              <a:off x="9382761" y="3141133"/>
-              <a:ext cx="1236133" cy="369332"/>
-            </a:xfrm>
-            <a:prstGeom prst="rect">
-              <a:avLst/>
-            </a:prstGeom>
-            <a:noFill/>
-          </p:spPr>
-          <p:txBody>
-            <a:bodyPr wrap="square" rtlCol="0">
-              <a:spAutoFit/>
-            </a:bodyPr>
-            <a:lstStyle/>
-            <a:p>
-              <a:r>
-                <a:rPr lang="pt-BR" dirty="0"/>
-                <a:t>Admin</a:t>
-              </a:r>
-            </a:p>
-          </p:txBody>
-        </p:sp>
-      </p:grpSp>
       <p:cxnSp>
         <p:nvCxnSpPr>
           <p:cNvPr id="16" name="Straight Connector 15">
@@ -3987,7 +4325,6 @@
           </p:cNvPr>
           <p:cNvCxnSpPr>
             <a:cxnSpLocks/>
-            <a:stCxn id="9" idx="6"/>
             <a:endCxn id="5" idx="2"/>
           </p:cNvCxnSpPr>
           <p:nvPr/>
@@ -4027,7 +4364,6 @@
           </p:cNvPr>
           <p:cNvCxnSpPr>
             <a:cxnSpLocks/>
-            <a:stCxn id="11" idx="6"/>
             <a:endCxn id="7" idx="2"/>
           </p:cNvCxnSpPr>
           <p:nvPr/>
@@ -4067,7 +4403,6 @@
           </p:cNvPr>
           <p:cNvCxnSpPr>
             <a:cxnSpLocks/>
-            <a:stCxn id="9" idx="6"/>
             <a:endCxn id="6" idx="2"/>
           </p:cNvCxnSpPr>
           <p:nvPr/>
@@ -4107,7 +4442,6 @@
           </p:cNvPr>
           <p:cNvCxnSpPr>
             <a:cxnSpLocks/>
-            <a:stCxn id="11" idx="6"/>
             <a:endCxn id="6" idx="2"/>
           </p:cNvCxnSpPr>
           <p:nvPr/>
@@ -4147,7 +4481,6 @@
           </p:cNvPr>
           <p:cNvCxnSpPr>
             <a:cxnSpLocks/>
-            <a:stCxn id="11" idx="6"/>
             <a:endCxn id="8" idx="2"/>
           </p:cNvCxnSpPr>
           <p:nvPr/>
@@ -4187,7 +4520,6 @@
           </p:cNvPr>
           <p:cNvCxnSpPr>
             <a:cxnSpLocks/>
-            <a:stCxn id="13" idx="2"/>
             <a:endCxn id="5" idx="6"/>
           </p:cNvCxnSpPr>
           <p:nvPr/>
@@ -4227,7 +4559,6 @@
           </p:cNvPr>
           <p:cNvCxnSpPr>
             <a:cxnSpLocks/>
-            <a:stCxn id="13" idx="2"/>
             <a:endCxn id="7" idx="6"/>
           </p:cNvCxnSpPr>
           <p:nvPr/>
@@ -4267,7 +4598,6 @@
           </p:cNvPr>
           <p:cNvCxnSpPr>
             <a:cxnSpLocks/>
-            <a:stCxn id="13" idx="2"/>
             <a:endCxn id="6" idx="6"/>
           </p:cNvCxnSpPr>
           <p:nvPr/>
@@ -4307,7 +4637,6 @@
           </p:cNvPr>
           <p:cNvCxnSpPr>
             <a:cxnSpLocks/>
-            <a:stCxn id="13" idx="2"/>
             <a:endCxn id="8" idx="6"/>
           </p:cNvCxnSpPr>
           <p:nvPr/>
@@ -4341,6 +4670,221 @@
           </a:fontRef>
         </p:style>
       </p:cxnSp>
+      <p:pic>
+        <p:nvPicPr>
+          <p:cNvPr id="3" name="Picture 2" descr="A black and white symbol&#10;&#10;AI-generated content may be incorrect.">
+            <a:extLst>
+              <a:ext uri="{FF2B5EF4-FFF2-40B4-BE49-F238E27FC236}">
+                <a16:creationId xmlns:a16="http://schemas.microsoft.com/office/drawing/2014/main" id="{C7AD4177-C306-1309-7AF2-601E3C78ECC3}"/>
+              </a:ext>
+            </a:extLst>
+          </p:cNvPr>
+          <p:cNvPicPr>
+            <a:picLocks noChangeAspect="1"/>
+          </p:cNvPicPr>
+          <p:nvPr/>
+        </p:nvPicPr>
+        <p:blipFill>
+          <a:blip r:embed="rId3">
+            <a:extLst>
+              <a:ext uri="{28A0092B-C50C-407E-A947-70E740481C1C}">
+                <a14:useLocalDpi xmlns:a14="http://schemas.microsoft.com/office/drawing/2010/main" val="0"/>
+              </a:ext>
+            </a:extLst>
+          </a:blip>
+          <a:stretch>
+            <a:fillRect/>
+          </a:stretch>
+        </p:blipFill>
+        <p:spPr>
+          <a:xfrm>
+            <a:off x="2426544" y="559224"/>
+            <a:ext cx="733425" cy="1562100"/>
+          </a:xfrm>
+          <a:prstGeom prst="rect">
+            <a:avLst/>
+          </a:prstGeom>
+        </p:spPr>
+      </p:pic>
+      <p:sp>
+        <p:nvSpPr>
+          <p:cNvPr id="15" name="TextBox 14">
+            <a:extLst>
+              <a:ext uri="{FF2B5EF4-FFF2-40B4-BE49-F238E27FC236}">
+                <a16:creationId xmlns:a16="http://schemas.microsoft.com/office/drawing/2014/main" id="{83382DBF-2F96-97C9-FC3A-4F38EC26A10E}"/>
+              </a:ext>
+            </a:extLst>
+          </p:cNvPr>
+          <p:cNvSpPr txBox="1"/>
+          <p:nvPr/>
+        </p:nvSpPr>
+        <p:spPr>
+          <a:xfrm>
+            <a:off x="2356272" y="2152558"/>
+            <a:ext cx="1022773" cy="369332"/>
+          </a:xfrm>
+          <a:prstGeom prst="rect">
+            <a:avLst/>
+          </a:prstGeom>
+          <a:noFill/>
+        </p:spPr>
+        <p:txBody>
+          <a:bodyPr wrap="square" rtlCol="0">
+            <a:spAutoFit/>
+          </a:bodyPr>
+          <a:lstStyle/>
+          <a:p>
+            <a:r>
+              <a:rPr lang="pt-BR" dirty="0" err="1"/>
+              <a:t>Patient</a:t>
+            </a:r>
+            <a:endParaRPr lang="pt-BR" dirty="0"/>
+          </a:p>
+        </p:txBody>
+      </p:sp>
+      <p:pic>
+        <p:nvPicPr>
+          <p:cNvPr id="17" name="Picture 16" descr="A black and white symbol&#10;&#10;AI-generated content may be incorrect.">
+            <a:extLst>
+              <a:ext uri="{FF2B5EF4-FFF2-40B4-BE49-F238E27FC236}">
+                <a16:creationId xmlns:a16="http://schemas.microsoft.com/office/drawing/2014/main" id="{850967F1-A5ED-644C-E7AB-9F6AA0F4066E}"/>
+              </a:ext>
+            </a:extLst>
+          </p:cNvPr>
+          <p:cNvPicPr>
+            <a:picLocks noChangeAspect="1"/>
+          </p:cNvPicPr>
+          <p:nvPr/>
+        </p:nvPicPr>
+        <p:blipFill>
+          <a:blip r:embed="rId3">
+            <a:extLst>
+              <a:ext uri="{28A0092B-C50C-407E-A947-70E740481C1C}">
+                <a14:useLocalDpi xmlns:a14="http://schemas.microsoft.com/office/drawing/2010/main" val="0"/>
+              </a:ext>
+            </a:extLst>
+          </a:blip>
+          <a:stretch>
+            <a:fillRect/>
+          </a:stretch>
+        </p:blipFill>
+        <p:spPr>
+          <a:xfrm>
+            <a:off x="2450677" y="3004351"/>
+            <a:ext cx="733425" cy="1562100"/>
+          </a:xfrm>
+          <a:prstGeom prst="rect">
+            <a:avLst/>
+          </a:prstGeom>
+        </p:spPr>
+      </p:pic>
+      <p:sp>
+        <p:nvSpPr>
+          <p:cNvPr id="18" name="TextBox 17">
+            <a:extLst>
+              <a:ext uri="{FF2B5EF4-FFF2-40B4-BE49-F238E27FC236}">
+                <a16:creationId xmlns:a16="http://schemas.microsoft.com/office/drawing/2014/main" id="{3EBAA849-E940-04A6-0260-F1BAF974676B}"/>
+              </a:ext>
+            </a:extLst>
+          </p:cNvPr>
+          <p:cNvSpPr txBox="1"/>
+          <p:nvPr/>
+        </p:nvSpPr>
+        <p:spPr>
+          <a:xfrm>
+            <a:off x="2380405" y="4597685"/>
+            <a:ext cx="1022773" cy="369332"/>
+          </a:xfrm>
+          <a:prstGeom prst="rect">
+            <a:avLst/>
+          </a:prstGeom>
+          <a:noFill/>
+        </p:spPr>
+        <p:txBody>
+          <a:bodyPr wrap="square" rtlCol="0">
+            <a:spAutoFit/>
+          </a:bodyPr>
+          <a:lstStyle/>
+          <a:p>
+            <a:r>
+              <a:rPr lang="pt-BR" dirty="0" err="1"/>
+              <a:t>Doctor</a:t>
+            </a:r>
+            <a:endParaRPr lang="pt-BR" dirty="0"/>
+          </a:p>
+        </p:txBody>
+      </p:sp>
+      <p:pic>
+        <p:nvPicPr>
+          <p:cNvPr id="20" name="Picture 19" descr="A black and white symbol&#10;&#10;AI-generated content may be incorrect.">
+            <a:extLst>
+              <a:ext uri="{FF2B5EF4-FFF2-40B4-BE49-F238E27FC236}">
+                <a16:creationId xmlns:a16="http://schemas.microsoft.com/office/drawing/2014/main" id="{B233BB52-FCFE-E1D7-BECE-F400FA1ACDE4}"/>
+              </a:ext>
+            </a:extLst>
+          </p:cNvPr>
+          <p:cNvPicPr>
+            <a:picLocks noChangeAspect="1"/>
+          </p:cNvPicPr>
+          <p:nvPr/>
+        </p:nvPicPr>
+        <p:blipFill>
+          <a:blip r:embed="rId3">
+            <a:extLst>
+              <a:ext uri="{28A0092B-C50C-407E-A947-70E740481C1C}">
+                <a14:useLocalDpi xmlns:a14="http://schemas.microsoft.com/office/drawing/2010/main" val="0"/>
+              </a:ext>
+            </a:extLst>
+          </a:blip>
+          <a:stretch>
+            <a:fillRect/>
+          </a:stretch>
+        </p:blipFill>
+        <p:spPr>
+          <a:xfrm>
+            <a:off x="8662035" y="1579033"/>
+            <a:ext cx="733425" cy="1562100"/>
+          </a:xfrm>
+          <a:prstGeom prst="rect">
+            <a:avLst/>
+          </a:prstGeom>
+        </p:spPr>
+      </p:pic>
+      <p:sp>
+        <p:nvSpPr>
+          <p:cNvPr id="21" name="TextBox 20">
+            <a:extLst>
+              <a:ext uri="{FF2B5EF4-FFF2-40B4-BE49-F238E27FC236}">
+                <a16:creationId xmlns:a16="http://schemas.microsoft.com/office/drawing/2014/main" id="{8B1A246A-805C-82E6-5BCE-B7E1C654F548}"/>
+              </a:ext>
+            </a:extLst>
+          </p:cNvPr>
+          <p:cNvSpPr txBox="1"/>
+          <p:nvPr/>
+        </p:nvSpPr>
+        <p:spPr>
+          <a:xfrm>
+            <a:off x="8591763" y="3172367"/>
+            <a:ext cx="1022773" cy="369332"/>
+          </a:xfrm>
+          <a:prstGeom prst="rect">
+            <a:avLst/>
+          </a:prstGeom>
+          <a:noFill/>
+        </p:spPr>
+        <p:txBody>
+          <a:bodyPr wrap="square" rtlCol="0">
+            <a:spAutoFit/>
+          </a:bodyPr>
+          <a:lstStyle/>
+          <a:p>
+            <a:r>
+              <a:rPr lang="pt-BR" dirty="0"/>
+              <a:t>Admin</a:t>
+            </a:r>
+          </a:p>
+        </p:txBody>
+      </p:sp>
     </p:spTree>
     <p:extLst>
       <p:ext uri="{BB962C8B-B14F-4D97-AF65-F5344CB8AC3E}">
@@ -4667,4 +5211,319 @@
     </a:ext>
   </a:extLst>
 </a:theme>
+</file>
+
+<file path=ppt/theme/theme2.xml><?xml version="1.0" encoding="utf-8"?>
+<a:theme xmlns:a="http://schemas.openxmlformats.org/drawingml/2006/main" name="Office Theme">
+  <a:themeElements>
+    <a:clrScheme name="Office">
+      <a:dk1>
+        <a:sysClr val="windowText" lastClr="000000"/>
+      </a:dk1>
+      <a:lt1>
+        <a:sysClr val="window" lastClr="FFFFFF"/>
+      </a:lt1>
+      <a:dk2>
+        <a:srgbClr val="0E2841"/>
+      </a:dk2>
+      <a:lt2>
+        <a:srgbClr val="E8E8E8"/>
+      </a:lt2>
+      <a:accent1>
+        <a:srgbClr val="156082"/>
+      </a:accent1>
+      <a:accent2>
+        <a:srgbClr val="E97132"/>
+      </a:accent2>
+      <a:accent3>
+        <a:srgbClr val="196B24"/>
+      </a:accent3>
+      <a:accent4>
+        <a:srgbClr val="0F9ED5"/>
+      </a:accent4>
+      <a:accent5>
+        <a:srgbClr val="A02B93"/>
+      </a:accent5>
+      <a:accent6>
+        <a:srgbClr val="4EA72E"/>
+      </a:accent6>
+      <a:hlink>
+        <a:srgbClr val="467886"/>
+      </a:hlink>
+      <a:folHlink>
+        <a:srgbClr val="96607D"/>
+      </a:folHlink>
+    </a:clrScheme>
+    <a:fontScheme name="Office">
+      <a:majorFont>
+        <a:latin typeface="Aptos Display" panose="02110004020202020204"/>
+        <a:ea typeface=""/>
+        <a:cs typeface=""/>
+        <a:font script="Jpan" typeface="游ゴシック Light"/>
+        <a:font script="Hang" typeface="맑은 고딕"/>
+        <a:font script="Hans" typeface="等线 Light"/>
+        <a:font script="Hant" typeface="新細明體"/>
+        <a:font script="Arab" typeface="Times New Roman"/>
+        <a:font script="Hebr" typeface="Times New Roman"/>
+        <a:font script="Thai" typeface="Angsana New"/>
+        <a:font script="Ethi" typeface="Nyala"/>
+        <a:font script="Beng" typeface="Vrinda"/>
+        <a:font script="Gujr" typeface="Shruti"/>
+        <a:font script="Khmr" typeface="MoolBoran"/>
+        <a:font script="Knda" typeface="Tunga"/>
+        <a:font script="Guru" typeface="Raavi"/>
+        <a:font script="Cans" typeface="Euphemia"/>
+        <a:font script="Cher" typeface="Plantagenet Cherokee"/>
+        <a:font script="Yiii" typeface="Microsoft Yi Baiti"/>
+        <a:font script="Tibt" typeface="Microsoft Himalaya"/>
+        <a:font script="Thaa" typeface="MV Boli"/>
+        <a:font script="Deva" typeface="Mangal"/>
+        <a:font script="Telu" typeface="Gautami"/>
+        <a:font script="Taml" typeface="Latha"/>
+        <a:font script="Syrc" typeface="Estrangelo Edessa"/>
+        <a:font script="Orya" typeface="Kalinga"/>
+        <a:font script="Mlym" typeface="Kartika"/>
+        <a:font script="Laoo" typeface="DokChampa"/>
+        <a:font script="Sinh" typeface="Iskoola Pota"/>
+        <a:font script="Mong" typeface="Mongolian Baiti"/>
+        <a:font script="Viet" typeface="Times New Roman"/>
+        <a:font script="Uigh" typeface="Microsoft Uighur"/>
+        <a:font script="Geor" typeface="Sylfaen"/>
+        <a:font script="Armn" typeface="Arial"/>
+        <a:font script="Bugi" typeface="Leelawadee UI"/>
+        <a:font script="Bopo" typeface="Microsoft JhengHei"/>
+        <a:font script="Java" typeface="Javanese Text"/>
+        <a:font script="Lisu" typeface="Segoe UI"/>
+        <a:font script="Mymr" typeface="Myanmar Text"/>
+        <a:font script="Nkoo" typeface="Ebrima"/>
+        <a:font script="Olck" typeface="Nirmala UI"/>
+        <a:font script="Osma" typeface="Ebrima"/>
+        <a:font script="Phag" typeface="Phagspa"/>
+        <a:font script="Syrn" typeface="Estrangelo Edessa"/>
+        <a:font script="Syrj" typeface="Estrangelo Edessa"/>
+        <a:font script="Syre" typeface="Estrangelo Edessa"/>
+        <a:font script="Sora" typeface="Nirmala UI"/>
+        <a:font script="Tale" typeface="Microsoft Tai Le"/>
+        <a:font script="Talu" typeface="Microsoft New Tai Lue"/>
+        <a:font script="Tfng" typeface="Ebrima"/>
+      </a:majorFont>
+      <a:minorFont>
+        <a:latin typeface="Aptos" panose="02110004020202020204"/>
+        <a:ea typeface=""/>
+        <a:cs typeface=""/>
+        <a:font script="Jpan" typeface="游ゴシック"/>
+        <a:font script="Hang" typeface="맑은 고딕"/>
+        <a:font script="Hans" typeface="等线"/>
+        <a:font script="Hant" typeface="新細明體"/>
+        <a:font script="Arab" typeface="Arial"/>
+        <a:font script="Hebr" typeface="Arial"/>
+        <a:font script="Thai" typeface="Cordia New"/>
+        <a:font script="Ethi" typeface="Nyala"/>
+        <a:font script="Beng" typeface="Vrinda"/>
+        <a:font script="Gujr" typeface="Shruti"/>
+        <a:font script="Khmr" typeface="DaunPenh"/>
+        <a:font script="Knda" typeface="Tunga"/>
+        <a:font script="Guru" typeface="Raavi"/>
+        <a:font script="Cans" typeface="Euphemia"/>
+        <a:font script="Cher" typeface="Plantagenet Cherokee"/>
+        <a:font script="Yiii" typeface="Microsoft Yi Baiti"/>
+        <a:font script="Tibt" typeface="Microsoft Himalaya"/>
+        <a:font script="Thaa" typeface="MV Boli"/>
+        <a:font script="Deva" typeface="Mangal"/>
+        <a:font script="Telu" typeface="Gautami"/>
+        <a:font script="Taml" typeface="Latha"/>
+        <a:font script="Syrc" typeface="Estrangelo Edessa"/>
+        <a:font script="Orya" typeface="Kalinga"/>
+        <a:font script="Mlym" typeface="Kartika"/>
+        <a:font script="Laoo" typeface="DokChampa"/>
+        <a:font script="Sinh" typeface="Iskoola Pota"/>
+        <a:font script="Mong" typeface="Mongolian Baiti"/>
+        <a:font script="Viet" typeface="Arial"/>
+        <a:font script="Uigh" typeface="Microsoft Uighur"/>
+        <a:font script="Geor" typeface="Sylfaen"/>
+        <a:font script="Armn" typeface="Arial"/>
+        <a:font script="Bugi" typeface="Leelawadee UI"/>
+        <a:font script="Bopo" typeface="Microsoft JhengHei"/>
+        <a:font script="Java" typeface="Javanese Text"/>
+        <a:font script="Lisu" typeface="Segoe UI"/>
+        <a:font script="Mymr" typeface="Myanmar Text"/>
+        <a:font script="Nkoo" typeface="Ebrima"/>
+        <a:font script="Olck" typeface="Nirmala UI"/>
+        <a:font script="Osma" typeface="Ebrima"/>
+        <a:font script="Phag" typeface="Phagspa"/>
+        <a:font script="Syrn" typeface="Estrangelo Edessa"/>
+        <a:font script="Syrj" typeface="Estrangelo Edessa"/>
+        <a:font script="Syre" typeface="Estrangelo Edessa"/>
+        <a:font script="Sora" typeface="Nirmala UI"/>
+        <a:font script="Tale" typeface="Microsoft Tai Le"/>
+        <a:font script="Talu" typeface="Microsoft New Tai Lue"/>
+        <a:font script="Tfng" typeface="Ebrima"/>
+      </a:minorFont>
+    </a:fontScheme>
+    <a:fmtScheme name="Office">
+      <a:fillStyleLst>
+        <a:solidFill>
+          <a:schemeClr val="phClr"/>
+        </a:solidFill>
+        <a:gradFill rotWithShape="1">
+          <a:gsLst>
+            <a:gs pos="0">
+              <a:schemeClr val="phClr">
+                <a:lumMod val="110000"/>
+                <a:satMod val="105000"/>
+                <a:tint val="67000"/>
+              </a:schemeClr>
+            </a:gs>
+            <a:gs pos="50000">
+              <a:schemeClr val="phClr">
+                <a:lumMod val="105000"/>
+                <a:satMod val="103000"/>
+                <a:tint val="73000"/>
+              </a:schemeClr>
+            </a:gs>
+            <a:gs pos="100000">
+              <a:schemeClr val="phClr">
+                <a:lumMod val="105000"/>
+                <a:satMod val="109000"/>
+                <a:tint val="81000"/>
+              </a:schemeClr>
+            </a:gs>
+          </a:gsLst>
+          <a:lin ang="5400000" scaled="0"/>
+        </a:gradFill>
+        <a:gradFill rotWithShape="1">
+          <a:gsLst>
+            <a:gs pos="0">
+              <a:schemeClr val="phClr">
+                <a:satMod val="103000"/>
+                <a:lumMod val="102000"/>
+                <a:tint val="94000"/>
+              </a:schemeClr>
+            </a:gs>
+            <a:gs pos="50000">
+              <a:schemeClr val="phClr">
+                <a:satMod val="110000"/>
+                <a:lumMod val="100000"/>
+                <a:shade val="100000"/>
+              </a:schemeClr>
+            </a:gs>
+            <a:gs pos="100000">
+              <a:schemeClr val="phClr">
+                <a:lumMod val="99000"/>
+                <a:satMod val="120000"/>
+                <a:shade val="78000"/>
+              </a:schemeClr>
+            </a:gs>
+          </a:gsLst>
+          <a:lin ang="5400000" scaled="0"/>
+        </a:gradFill>
+      </a:fillStyleLst>
+      <a:lnStyleLst>
+        <a:ln w="12700" cap="flat" cmpd="sng" algn="ctr">
+          <a:solidFill>
+            <a:schemeClr val="phClr"/>
+          </a:solidFill>
+          <a:prstDash val="solid"/>
+          <a:miter lim="800000"/>
+        </a:ln>
+        <a:ln w="19050" cap="flat" cmpd="sng" algn="ctr">
+          <a:solidFill>
+            <a:schemeClr val="phClr"/>
+          </a:solidFill>
+          <a:prstDash val="solid"/>
+          <a:miter lim="800000"/>
+        </a:ln>
+        <a:ln w="25400" cap="flat" cmpd="sng" algn="ctr">
+          <a:solidFill>
+            <a:schemeClr val="phClr"/>
+          </a:solidFill>
+          <a:prstDash val="solid"/>
+          <a:miter lim="800000"/>
+        </a:ln>
+      </a:lnStyleLst>
+      <a:effectStyleLst>
+        <a:effectStyle>
+          <a:effectLst/>
+        </a:effectStyle>
+        <a:effectStyle>
+          <a:effectLst/>
+        </a:effectStyle>
+        <a:effectStyle>
+          <a:effectLst>
+            <a:outerShdw blurRad="57150" dist="19050" dir="5400000" algn="ctr" rotWithShape="0">
+              <a:srgbClr val="000000">
+                <a:alpha val="63000"/>
+              </a:srgbClr>
+            </a:outerShdw>
+          </a:effectLst>
+        </a:effectStyle>
+      </a:effectStyleLst>
+      <a:bgFillStyleLst>
+        <a:solidFill>
+          <a:schemeClr val="phClr"/>
+        </a:solidFill>
+        <a:solidFill>
+          <a:schemeClr val="phClr">
+            <a:tint val="95000"/>
+            <a:satMod val="170000"/>
+          </a:schemeClr>
+        </a:solidFill>
+        <a:gradFill rotWithShape="1">
+          <a:gsLst>
+            <a:gs pos="0">
+              <a:schemeClr val="phClr">
+                <a:tint val="93000"/>
+                <a:satMod val="150000"/>
+                <a:shade val="98000"/>
+                <a:lumMod val="102000"/>
+              </a:schemeClr>
+            </a:gs>
+            <a:gs pos="50000">
+              <a:schemeClr val="phClr">
+                <a:tint val="98000"/>
+                <a:satMod val="130000"/>
+                <a:shade val="90000"/>
+                <a:lumMod val="103000"/>
+              </a:schemeClr>
+            </a:gs>
+            <a:gs pos="100000">
+              <a:schemeClr val="phClr">
+                <a:shade val="63000"/>
+                <a:satMod val="120000"/>
+              </a:schemeClr>
+            </a:gs>
+          </a:gsLst>
+          <a:lin ang="5400000" scaled="0"/>
+        </a:gradFill>
+      </a:bgFillStyleLst>
+    </a:fmtScheme>
+  </a:themeElements>
+  <a:objectDefaults>
+    <a:lnDef>
+      <a:spPr/>
+      <a:bodyPr/>
+      <a:lstStyle/>
+      <a:style>
+        <a:lnRef idx="2">
+          <a:schemeClr val="accent1"/>
+        </a:lnRef>
+        <a:fillRef idx="0">
+          <a:schemeClr val="accent1"/>
+        </a:fillRef>
+        <a:effectRef idx="1">
+          <a:schemeClr val="accent1"/>
+        </a:effectRef>
+        <a:fontRef idx="minor">
+          <a:schemeClr val="tx1"/>
+        </a:fontRef>
+      </a:style>
+    </a:lnDef>
+  </a:objectDefaults>
+  <a:extraClrSchemeLst/>
+  <a:extLst>
+    <a:ext uri="{05A4C25C-085E-4340-85A3-A5531E510DB2}">
+      <thm15:themeFamily xmlns:thm15="http://schemas.microsoft.com/office/thememl/2012/main" name="Office Theme" id="{2E142A2C-CD16-42D6-873A-C26D2A0506FA}" vid="{1BDDFF52-6CD6-40A5-AB3C-68EB2F1E4D0A}"/>
+    </a:ext>
+  </a:extLst>
+</a:theme>
 </file>